--- a/Умный паркинг2 (1).pptx
+++ b/Умный паркинг2 (1).pptx
@@ -5,10 +5,10 @@
     <p:sldMasterId id="2147483648" r:id="rId1"/>
   </p:sldMasterIdLst>
   <p:notesMasterIdLst>
-    <p:notesMasterId r:id="rId10"/>
+    <p:notesMasterId r:id="rId9"/>
   </p:notesMasterIdLst>
   <p:handoutMasterIdLst>
-    <p:handoutMasterId r:id="rId11"/>
+    <p:handoutMasterId r:id="rId10"/>
   </p:handoutMasterIdLst>
   <p:sldIdLst>
     <p:sldId id="258" r:id="rId2"/>
@@ -17,8 +17,7 @@
     <p:sldId id="263" r:id="rId5"/>
     <p:sldId id="264" r:id="rId6"/>
     <p:sldId id="267" r:id="rId7"/>
-    <p:sldId id="275" r:id="rId8"/>
-    <p:sldId id="274" r:id="rId9"/>
+    <p:sldId id="274" r:id="rId8"/>
   </p:sldIdLst>
   <p:sldSz cx="9906000" cy="6858000" type="A4"/>
   <p:notesSz cx="6669088" cy="9926638"/>
@@ -224,7 +223,7 @@
             <a:fld id="{5790C10C-E189-4D0E-8B6D-984CDA70A76C}" type="datetimeFigureOut">
               <a:rPr lang="ru-RU" smtClean="0"/>
               <a:pPr/>
-              <a:t>24.10.2026</a:t>
+              <a:t>25.10.2026</a:t>
             </a:fld>
             <a:endParaRPr lang="ru-RU"/>
           </a:p>
@@ -387,7 +386,7 @@
             <a:fld id="{6A763A28-3106-4A93-8C7A-33B0A2851E3A}" type="datetimeFigureOut">
               <a:rPr lang="ru-RU" smtClean="0"/>
               <a:pPr/>
-              <a:t>24.10.2026</a:t>
+              <a:t>25.10.2026</a:t>
             </a:fld>
             <a:endParaRPr lang="ru-RU"/>
           </a:p>
@@ -1381,7 +1380,7 @@
             <a:fld id="{58859611-BC2D-452B-992C-3E0D81FBBAEF}" type="slidenum">
               <a:rPr lang="ru-RU" smtClean="0"/>
               <a:pPr/>
-              <a:t>8</a:t>
+              <a:t>7</a:t>
             </a:fld>
             <a:endParaRPr lang="ru-RU"/>
           </a:p>
@@ -1580,7 +1579,7 @@
             <a:fld id="{E9FC7C44-468A-493B-B161-A7D82D313D7D}" type="datetime1">
               <a:rPr lang="ru-RU" smtClean="0"/>
               <a:pPr/>
-              <a:t>24.10.2026</a:t>
+              <a:t>25.10.2026</a:t>
             </a:fld>
             <a:endParaRPr lang="ru-RU"/>
           </a:p>
@@ -1749,7 +1748,7 @@
             <a:fld id="{37A18DC8-44D6-45E3-9BA5-F62A05AA5D6E}" type="datetime1">
               <a:rPr lang="ru-RU" smtClean="0"/>
               <a:pPr/>
-              <a:t>24.10.2026</a:t>
+              <a:t>25.10.2026</a:t>
             </a:fld>
             <a:endParaRPr lang="ru-RU"/>
           </a:p>
@@ -1928,7 +1927,7 @@
             <a:fld id="{31B5540E-382C-4976-B827-E845430A573F}" type="datetime1">
               <a:rPr lang="ru-RU" smtClean="0"/>
               <a:pPr/>
-              <a:t>24.10.2026</a:t>
+              <a:t>25.10.2026</a:t>
             </a:fld>
             <a:endParaRPr lang="ru-RU"/>
           </a:p>
@@ -2097,7 +2096,7 @@
             <a:fld id="{14C60D1C-EDB9-4B93-8D73-0FA7918307A9}" type="datetime1">
               <a:rPr lang="ru-RU" smtClean="0"/>
               <a:pPr/>
-              <a:t>24.10.2026</a:t>
+              <a:t>25.10.2026</a:t>
             </a:fld>
             <a:endParaRPr lang="ru-RU"/>
           </a:p>
@@ -2343,7 +2342,7 @@
             <a:fld id="{D399DFAC-A9BA-4F76-9748-465EDB585122}" type="datetime1">
               <a:rPr lang="ru-RU" smtClean="0"/>
               <a:pPr/>
-              <a:t>24.10.2026</a:t>
+              <a:t>25.10.2026</a:t>
             </a:fld>
             <a:endParaRPr lang="ru-RU"/>
           </a:p>
@@ -2629,7 +2628,7 @@
             <a:fld id="{07DFF91C-8595-44E4-81EF-EA52DB92F3AD}" type="datetime1">
               <a:rPr lang="ru-RU" smtClean="0"/>
               <a:pPr/>
-              <a:t>24.10.2026</a:t>
+              <a:t>25.10.2026</a:t>
             </a:fld>
             <a:endParaRPr lang="ru-RU"/>
           </a:p>
@@ -3049,7 +3048,7 @@
             <a:fld id="{0FDAB43B-0EB7-4BA4-B522-2DA1DA75EE5D}" type="datetime1">
               <a:rPr lang="ru-RU" smtClean="0"/>
               <a:pPr/>
-              <a:t>24.10.2026</a:t>
+              <a:t>25.10.2026</a:t>
             </a:fld>
             <a:endParaRPr lang="ru-RU"/>
           </a:p>
@@ -3167,7 +3166,7 @@
             <a:fld id="{550D59C7-DD1B-4550-BD60-1533A4A45AF7}" type="datetime1">
               <a:rPr lang="ru-RU" smtClean="0"/>
               <a:pPr/>
-              <a:t>24.10.2026</a:t>
+              <a:t>25.10.2026</a:t>
             </a:fld>
             <a:endParaRPr lang="ru-RU"/>
           </a:p>
@@ -3263,7 +3262,7 @@
             <a:fld id="{5DAB328C-FCD7-4741-9FC4-480B7B48C2F6}" type="datetime1">
               <a:rPr lang="ru-RU" smtClean="0"/>
               <a:pPr/>
-              <a:t>24.10.2026</a:t>
+              <a:t>25.10.2026</a:t>
             </a:fld>
             <a:endParaRPr lang="ru-RU"/>
           </a:p>
@@ -3539,7 +3538,7 @@
             <a:fld id="{7AC01FEC-4FC5-4C45-80F9-74927CB2F0BE}" type="datetime1">
               <a:rPr lang="ru-RU" smtClean="0"/>
               <a:pPr/>
-              <a:t>24.10.2026</a:t>
+              <a:t>25.10.2026</a:t>
             </a:fld>
             <a:endParaRPr lang="ru-RU"/>
           </a:p>
@@ -3792,7 +3791,7 @@
             <a:fld id="{C988E8B6-0EC3-4330-B595-A12CB21C3019}" type="datetime1">
               <a:rPr lang="ru-RU" smtClean="0"/>
               <a:pPr/>
-              <a:t>24.10.2026</a:t>
+              <a:t>25.10.2026</a:t>
             </a:fld>
             <a:endParaRPr lang="ru-RU"/>
           </a:p>
@@ -4043,7 +4042,7 @@
             <a:fld id="{AC7368CF-747E-45D1-809A-D07469132383}" type="datetime1">
               <a:rPr lang="ru-RU" smtClean="0"/>
               <a:pPr/>
-              <a:t>24.10.2026</a:t>
+              <a:t>25.10.2026</a:t>
             </a:fld>
             <a:endParaRPr lang="ru-RU"/>
           </a:p>
@@ -4857,12 +4856,16 @@
   <p:clrMapOvr>
     <a:masterClrMapping/>
   </p:clrMapOvr>
-  <mc:AlternateContent xmlns:mc="http://schemas.openxmlformats.org/markup-compatibility/2006" xmlns:p14="http://schemas.microsoft.com/office/powerpoint/2010/main">
-    <mc:Choice Requires="p14">
-      <p:transition p14:dur="0"/>
+  <mc:AlternateContent xmlns:mc="http://schemas.openxmlformats.org/markup-compatibility/2006">
+    <mc:Choice xmlns:p14="http://schemas.microsoft.com/office/powerpoint/2010/main" Requires="p14">
+      <p:transition spd="slow" p14:dur="3400">
+        <p14:reveal/>
+      </p:transition>
     </mc:Choice>
-    <mc:Fallback xmlns="">
-      <p:transition/>
+    <mc:Fallback>
+      <p:transition spd="slow">
+        <p:fade/>
+      </p:transition>
     </mc:Fallback>
   </mc:AlternateContent>
   <p:timing>
@@ -4972,6 +4975,18 @@
   <p:clrMapOvr>
     <a:masterClrMapping/>
   </p:clrMapOvr>
+  <mc:AlternateContent xmlns:mc="http://schemas.openxmlformats.org/markup-compatibility/2006">
+    <mc:Choice xmlns:p14="http://schemas.microsoft.com/office/powerpoint/2010/main" Requires="p14">
+      <p:transition spd="slow" p14:dur="3400">
+        <p14:reveal/>
+      </p:transition>
+    </mc:Choice>
+    <mc:Fallback>
+      <p:transition spd="slow">
+        <p:fade/>
+      </p:transition>
+    </mc:Fallback>
+  </mc:AlternateContent>
   <p:timing>
     <p:tnLst>
       <p:par>
@@ -5049,11 +5064,15 @@
             </a:r>
             <a:r>
               <a:rPr lang="ru-RU" dirty="0"/>
-              <a:t> Сократить время поиска парковочного места и снизить загруженность парковочного </a:t>
-            </a:r>
-            <a:r>
-              <a:rPr lang="ru-RU" dirty="0" smtClean="0"/>
-              <a:t>пространства.</a:t>
+              <a:t> Сократить время поиска парковочного места и снизить загруженность </a:t>
+            </a:r>
+            <a:r>
+              <a:rPr lang="ru-RU"/>
+              <a:t>парковочного </a:t>
+            </a:r>
+            <a:r>
+              <a:rPr lang="ru-RU" smtClean="0"/>
+              <a:t>пространства</a:t>
             </a:r>
             <a:endParaRPr lang="ru-RU" dirty="0"/>
           </a:p>
@@ -5146,6 +5165,18 @@
   <p:clrMapOvr>
     <a:masterClrMapping/>
   </p:clrMapOvr>
+  <mc:AlternateContent xmlns:mc="http://schemas.openxmlformats.org/markup-compatibility/2006">
+    <mc:Choice xmlns:p14="http://schemas.microsoft.com/office/powerpoint/2010/main" Requires="p14">
+      <p:transition spd="slow" p14:dur="3400">
+        <p14:reveal/>
+      </p:transition>
+    </mc:Choice>
+    <mc:Fallback>
+      <p:transition spd="slow">
+        <p:fade/>
+      </p:transition>
+    </mc:Fallback>
+  </mc:AlternateContent>
   <p:timing>
     <p:tnLst>
       <p:par>
@@ -5211,7 +5242,7 @@
         <p:spPr/>
         <p:txBody>
           <a:bodyPr>
-            <a:normAutofit lnSpcReduction="10000"/>
+            <a:normAutofit fontScale="92500" lnSpcReduction="10000"/>
           </a:bodyPr>
           <a:lstStyle/>
           <a:p>
@@ -5246,8 +5277,35 @@
           </a:p>
           <a:p>
             <a:r>
+              <a:rPr lang="ru-RU" b="1" dirty="0"/>
+              <a:t>П</a:t>
+            </a:r>
+            <a:r>
               <a:rPr lang="ru-RU" b="1" dirty="0" smtClean="0"/>
-              <a:t>Вывод</a:t>
+              <a:t>арктроники</a:t>
+            </a:r>
+            <a:r>
+              <a:rPr lang="ru-RU" b="1" dirty="0"/>
+              <a:t>:</a:t>
+            </a:r>
+            <a:r>
+              <a:rPr lang="ru-RU" dirty="0"/>
+              <a:t> Помогают </a:t>
+            </a:r>
+            <a:r>
+              <a:rPr lang="ru-RU" dirty="0" smtClean="0"/>
+              <a:t>припарковаться.</a:t>
+            </a:r>
+            <a:endParaRPr lang="ru-RU" dirty="0"/>
+          </a:p>
+          <a:p>
+            <a:r>
+              <a:rPr lang="ru-RU" b="1" dirty="0"/>
+              <a:t>В</a:t>
+            </a:r>
+            <a:r>
+              <a:rPr lang="ru-RU" b="1" dirty="0" smtClean="0"/>
+              <a:t>ывод</a:t>
             </a:r>
             <a:r>
               <a:rPr lang="ru-RU" b="1" dirty="0"/>
@@ -5282,6 +5340,18 @@
   <p:clrMapOvr>
     <a:masterClrMapping/>
   </p:clrMapOvr>
+  <mc:AlternateContent xmlns:mc="http://schemas.openxmlformats.org/markup-compatibility/2006">
+    <mc:Choice xmlns:p14="http://schemas.microsoft.com/office/powerpoint/2010/main" Requires="p14">
+      <p:transition spd="slow" p14:dur="3400">
+        <p14:reveal/>
+      </p:transition>
+    </mc:Choice>
+    <mc:Fallback>
+      <p:transition spd="slow">
+        <p:fade/>
+      </p:transition>
+    </mc:Fallback>
+  </mc:AlternateContent>
   <p:timing>
     <p:tnLst>
       <p:par>
@@ -5414,6 +5484,18 @@
   <p:clrMapOvr>
     <a:masterClrMapping/>
   </p:clrMapOvr>
+  <mc:AlternateContent xmlns:mc="http://schemas.openxmlformats.org/markup-compatibility/2006">
+    <mc:Choice xmlns:p14="http://schemas.microsoft.com/office/powerpoint/2010/main" Requires="p14">
+      <p:transition spd="slow" p14:dur="3400">
+        <p14:reveal/>
+      </p:transition>
+    </mc:Choice>
+    <mc:Fallback>
+      <p:transition spd="slow">
+        <p:fade/>
+      </p:transition>
+    </mc:Fallback>
+  </mc:AlternateContent>
   <p:timing>
     <p:tnLst>
       <p:par>
@@ -5527,6 +5609,18 @@
   <p:clrMapOvr>
     <a:masterClrMapping/>
   </p:clrMapOvr>
+  <mc:AlternateContent xmlns:mc="http://schemas.openxmlformats.org/markup-compatibility/2006">
+    <mc:Choice xmlns:p14="http://schemas.microsoft.com/office/powerpoint/2010/main" Requires="p14">
+      <p:transition spd="slow" p14:dur="3400">
+        <p14:reveal/>
+      </p:transition>
+    </mc:Choice>
+    <mc:Fallback>
+      <p:transition spd="slow">
+        <p:fade/>
+      </p:transition>
+    </mc:Fallback>
+  </mc:AlternateContent>
   <p:timing>
     <p:tnLst>
       <p:par>
@@ -5566,63 +5660,10 @@
         </p:nvSpPr>
         <p:spPr>
           <a:xfrm>
-            <a:off x="432955" y="2332038"/>
+            <a:off x="495299" y="394407"/>
             <a:ext cx="8915400" cy="1143000"/>
           </a:xfrm>
         </p:spPr>
-        <p:txBody>
-          <a:bodyPr/>
-          <a:lstStyle/>
-          <a:p>
-            <a:r>
-              <a:rPr lang="ru-RU" dirty="0" smtClean="0"/>
-              <a:t>Демонстрация</a:t>
-            </a:r>
-            <a:endParaRPr lang="ru-RU" dirty="0"/>
-          </a:p>
-        </p:txBody>
-      </p:sp>
-    </p:spTree>
-    <p:extLst>
-      <p:ext uri="{BB962C8B-B14F-4D97-AF65-F5344CB8AC3E}">
-        <p14:creationId xmlns:p14="http://schemas.microsoft.com/office/powerpoint/2010/main" val="2591929754"/>
-      </p:ext>
-    </p:extLst>
-  </p:cSld>
-  <p:clrMapOvr>
-    <a:masterClrMapping/>
-  </p:clrMapOvr>
-</p:sld>
-</file>
-
-<file path=ppt/slides/slide8.xml><?xml version="1.0" encoding="utf-8"?>
-<p:sld xmlns:a="http://schemas.openxmlformats.org/drawingml/2006/main" xmlns:r="http://schemas.openxmlformats.org/officeDocument/2006/relationships" xmlns:p="http://schemas.openxmlformats.org/presentationml/2006/main">
-  <p:cSld>
-    <p:spTree>
-      <p:nvGrpSpPr>
-        <p:cNvPr id="1" name=""/>
-        <p:cNvGrpSpPr/>
-        <p:nvPr/>
-      </p:nvGrpSpPr>
-      <p:grpSpPr>
-        <a:xfrm>
-          <a:off x="0" y="0"/>
-          <a:ext cx="0" cy="0"/>
-          <a:chOff x="0" y="0"/>
-          <a:chExt cx="0" cy="0"/>
-        </a:xfrm>
-      </p:grpSpPr>
-      <p:sp>
-        <p:nvSpPr>
-          <p:cNvPr id="2" name="Заголовок 1"/>
-          <p:cNvSpPr>
-            <a:spLocks noGrp="1"/>
-          </p:cNvSpPr>
-          <p:nvPr>
-            <p:ph type="title"/>
-          </p:nvPr>
-        </p:nvSpPr>
-        <p:spPr/>
         <p:txBody>
           <a:bodyPr/>
           <a:lstStyle/>
@@ -5649,16 +5690,15 @@
             <p:ph idx="1"/>
           </p:nvPr>
         </p:nvSpPr>
-        <p:spPr/>
+        <p:spPr>
+          <a:xfrm>
+            <a:off x="495299" y="4639267"/>
+            <a:ext cx="8915400" cy="1367129"/>
+          </a:xfrm>
+        </p:spPr>
         <p:txBody>
           <a:bodyPr/>
           <a:lstStyle/>
-          <a:p>
-            <a:pPr marL="0" indent="0" algn="ctr">
-              <a:buNone/>
-            </a:pPr>
-            <a:endParaRPr lang="ru-RU" dirty="0" smtClean="0"/>
-          </a:p>
           <a:p>
             <a:pPr marL="0" indent="0" algn="ctr">
               <a:buNone/>
@@ -5667,18 +5707,13 @@
               <a:rPr lang="ru-RU" dirty="0" smtClean="0">
                 <a:latin typeface="Arial Black" panose="020B0A04020102020204" pitchFamily="34" charset="0"/>
               </a:rPr>
-              <a:t>Благодарим за внимание!</a:t>
-            </a:r>
-          </a:p>
-          <a:p>
-            <a:pPr marL="0" indent="0" algn="ctr">
-              <a:buNone/>
-            </a:pPr>
+              <a:t>Готовы </a:t>
+            </a:r>
             <a:r>
               <a:rPr lang="ru-RU" dirty="0" smtClean="0">
                 <a:latin typeface="Arial Black" panose="020B0A04020102020204" pitchFamily="34" charset="0"/>
               </a:rPr>
-              <a:t>Готовы ответить на ваши вопросы.</a:t>
+              <a:t>ответить на ваши вопросы.</a:t>
             </a:r>
             <a:endParaRPr lang="en-US" dirty="0" smtClean="0">
               <a:latin typeface="Arial Black" panose="020B0A04020102020204" pitchFamily="34" charset="0"/>
@@ -5724,6 +5759,66 @@
           </a:p>
         </p:txBody>
       </p:sp>
+      <p:sp>
+        <p:nvSpPr>
+          <p:cNvPr id="4" name="Прямоугольник 3"/>
+          <p:cNvSpPr/>
+          <p:nvPr/>
+        </p:nvSpPr>
+        <p:spPr>
+          <a:xfrm>
+            <a:off x="-419101" y="1657176"/>
+            <a:ext cx="10744201" cy="2585323"/>
+          </a:xfrm>
+          <a:prstGeom prst="rect">
+            <a:avLst/>
+          </a:prstGeom>
+        </p:spPr>
+        <p:txBody>
+          <a:bodyPr wrap="square">
+            <a:spAutoFit/>
+          </a:bodyPr>
+          <a:lstStyle/>
+          <a:p>
+            <a:pPr algn="ctr"/>
+            <a:endParaRPr lang="ru-RU" sz="5400" dirty="0"/>
+          </a:p>
+          <a:p>
+            <a:pPr algn="ctr"/>
+            <a:r>
+              <a:rPr lang="ru-RU" sz="5400" dirty="0" smtClean="0">
+                <a:latin typeface="Arial Black" panose="020B0A04020102020204" pitchFamily="34" charset="0"/>
+              </a:rPr>
+              <a:t>Спасибо </a:t>
+            </a:r>
+            <a:r>
+              <a:rPr lang="ru-RU" sz="5400" dirty="0">
+                <a:latin typeface="Arial Black" panose="020B0A04020102020204" pitchFamily="34" charset="0"/>
+              </a:rPr>
+              <a:t>за внимание</a:t>
+            </a:r>
+            <a:r>
+              <a:rPr lang="ru-RU" sz="5400" dirty="0" smtClean="0">
+                <a:latin typeface="Arial Black" panose="020B0A04020102020204" pitchFamily="34" charset="0"/>
+              </a:rPr>
+              <a:t>!</a:t>
+            </a:r>
+            <a:endParaRPr lang="ru-RU" sz="5400" dirty="0" smtClean="0"/>
+          </a:p>
+          <a:p>
+            <a:pPr algn="ctr"/>
+            <a:endParaRPr lang="ru-RU" sz="5400" dirty="0">
+              <a:ln>
+                <a:solidFill>
+                  <a:srgbClr val="002060"/>
+                </a:solidFill>
+              </a:ln>
+              <a:latin typeface="Arial" panose="020B0604020202020204" pitchFamily="34" charset="0"/>
+              <a:cs typeface="Arial" panose="020B0604020202020204" pitchFamily="34" charset="0"/>
+            </a:endParaRPr>
+          </a:p>
+        </p:txBody>
+      </p:sp>
     </p:spTree>
     <p:extLst>
       <p:ext uri="{BB962C8B-B14F-4D97-AF65-F5344CB8AC3E}">
@@ -5734,6 +5829,18 @@
   <p:clrMapOvr>
     <a:masterClrMapping/>
   </p:clrMapOvr>
+  <mc:AlternateContent xmlns:mc="http://schemas.openxmlformats.org/markup-compatibility/2006">
+    <mc:Choice xmlns:p14="http://schemas.microsoft.com/office/powerpoint/2010/main" Requires="p14">
+      <p:transition spd="slow" p14:dur="3400">
+        <p14:reveal/>
+      </p:transition>
+    </mc:Choice>
+    <mc:Fallback>
+      <p:transition spd="slow">
+        <p:fade/>
+      </p:transition>
+    </mc:Fallback>
+  </mc:AlternateContent>
   <p:timing>
     <p:tnLst>
       <p:par>
